--- a/slides/Module_12_Three_Person_Team.pptx
+++ b/slides/Module_12_Three_Person_Team.pptx
@@ -4955,7 +4955,7 @@
                   <a:srgbClr val="5B8DB8"/>
                 </a:solidFill>
               </a:rPr>
-              <a:t>DISCUSSION  +  PROGRAMME CLOSE</a:t>
+              <a:t>DISCUSSION  +  PROGRAM CLOSE</a:t>
             </a:r>
             <a:endParaRPr lang="en-US" sz="1300" dirty="0"/>
           </a:p>
@@ -5078,7 +5078,7 @@
                   <a:srgbClr val="D4E4F0"/>
                 </a:solidFill>
               </a:rPr>
-              <a:t>Q1.  What is the single biggest cultural barrier to adopting the three-person equal-peers model in your organisation?</a:t>
+              <a:t>Q1.  What is the single biggest cultural barrier to adopting the three-person equal-peers model in your organization?</a:t>
             </a:r>
             <a:endParaRPr lang="en-US" sz="1100" dirty="0"/>
           </a:p>
@@ -5418,7 +5418,7 @@
                   <a:srgbClr val="FFFFFF"/>
                 </a:solidFill>
               </a:rPr>
-              <a:t>ENTERPRISE AGENTIC PRACTICES  —  12-MODULE PROGRAMME  COMPLETE</a:t>
+              <a:t>ENTERPRISE AGENTIC PRACTICES  —  12-MODULE PROGRAM  COMPLETE</a:t>
             </a:r>
             <a:endParaRPr lang="en-US" sz="1200" dirty="0"/>
           </a:p>
@@ -7628,7 +7628,7 @@
                   <a:srgbClr val="D4E4F0"/>
                 </a:solidFill>
               </a:rPr>
-              <a:t>Three people: 3 communication paths, minimal meeting overhead, no organisational politics, no consensus-building paralysis. Every person can hold the full team’s state in their head at once.</a:t>
+              <a:t>Three people: 3 communication paths, minimal meeting overhead, no organizational politics, no consensus-building paralysis. Every person can hold the full team’s state in their head at once.</a:t>
             </a:r>
             <a:endParaRPr lang="en-US" sz="1100" dirty="0"/>
           </a:p>
@@ -8590,7 +8590,7 @@
                   <a:srgbClr val="1E2D3D"/>
                 </a:solidFill>
               </a:rPr>
-              <a:t>• Takes approved PRDs and produces complete SDD artefacts</a:t>
+              <a:t>• Takes approved PRDs and produces complete SDD artifacts</a:t>
             </a:r>
             <a:endParaRPr lang="en-US" sz="1050" dirty="0"/>
           </a:p>
@@ -12085,7 +12085,7 @@
                   <a:srgbClr val="7A90A8"/>
                 </a:solidFill>
               </a:rPr>
-              <a:t>Advocate for performance budgets. Flag when velocity is being prioritised at the cost of system responsiveness.</a:t>
+              <a:t>Advocate for performance budgets. Flag when velocity is being prioritized at the cost of system responsiveness.</a:t>
             </a:r>
             <a:endParaRPr lang="en-US" sz="1050" dirty="0"/>
           </a:p>
